--- a/vta/slides/Module_4_Vent_Vocabulary_Initial_Settings.pptx
+++ b/vta/slides/Module_4_Vent_Vocabulary_Initial_Settings.pptx
@@ -1237,7 +1237,7 @@
 Examples. 5'6" man: 50 + 2.3 × 6 = 63.8 kg → safe Vt 380–510 mL. 5'10" woman: 45.5 + 2.3 × 10 = 68.5 kg → safe Vt 410–548 mL.
 Safe adult defaults to defend: AC/VC mode; Vt 6–8 mL/kg IBW; RR 14, titrated to EtCO₂ 35–45; FiO₂ 100% then wean; PEEP 5; I:E 1:2; alarms PIP 35, low MV 4, low PEEP 3, apnea 20 sec.
 When in doubt, return to defaults. Change ONE thing at a time, reassess in 30 seconds, and document with vitals before and after.
-PEARL — 5'10" rule of thumb: 5'10" adult ≈ 73 kg IBW → Vt 440–580 mL. Memorize this anchor for when you don't have a card handy.</a:t>
+PEARL — 5'10" rule of thumb: IBW is sex-specific — one number won't do. By the Devine formulas a 5'10" man ≈ 73 kg (Vt 440–580 mL) and a 5'10" woman ≈ 68.5 kg (Vt 410–548 mL). Anchor to the patient's sex and height, never actual weight.</a:t>
             </a:r>
             <a:endParaRPr lang="en-US" dirty="0"/>
           </a:p>
@@ -1967,7 +1967,7 @@
                 <a:ea typeface="Calibri" pitchFamily="34" charset="-122"/>
                 <a:cs typeface="Calibri" pitchFamily="34" charset="-120"/>
               </a:rPr>
-              <a:t>Day 1 · Foundations</a:t>
+              <a:t>Foundations</a:t>
             </a:r>
             <a:pPr indent="0" marL="0">
               <a:buNone/>
@@ -1981,7 +1981,7 @@
                 <a:ea typeface="Calibri" pitchFamily="34" charset="-122"/>
                 <a:cs typeface="Calibri" pitchFamily="34" charset="-120"/>
               </a:rPr>
-              <a:t>   ·   ~50 min   ·   6 lessons</a:t>
+              <a:t>   ·   6 lessons</a:t>
             </a:r>
             <a:endParaRPr lang="en-US" sz="1300" dirty="0"/>
           </a:p>
@@ -2295,7 +2295,7 @@
                 <a:ea typeface="Calibri" pitchFamily="34" charset="-122"/>
                 <a:cs typeface="Calibri" pitchFamily="34" charset="-120"/>
               </a:rPr>
-              <a:t>5'10" adult ≈ 73 kg IBW → Vt 440–580 mL. Memorize this anchor for when you don't have a card handy.</a:t>
+              <a:t>IBW is sex-specific — one number won't do. By the Devine formulas a 5'10" man ≈ 73 kg (Vt 440–580 mL) and a 5'10" woman ≈ 68.5 kg (Vt 410–548 mL).…</a:t>
             </a:r>
             <a:endParaRPr lang="en-US" sz="1700" dirty="0"/>
           </a:p>
@@ -3589,7 +3589,7 @@
         <p:spPr>
           <a:xfrm>
             <a:off x="548640" y="2148840"/>
-            <a:ext cx="6309360" cy="4114800"/>
+            <a:ext cx="6309360" cy="4160520"/>
           </a:xfrm>
           <a:prstGeom prst="rect">
             <a:avLst/>
@@ -3606,7 +3606,7 @@
                 <a:spcPct val="100000"/>
               </a:lnSpc>
               <a:spcAft>
-                <a:spcPts val="900"/>
+                <a:spcPts val="1000"/>
               </a:spcAft>
               <a:buSzPct val="100000"/>
               <a:buChar char="•"/>
@@ -3630,7 +3630,7 @@
                 <a:spcPct val="100000"/>
               </a:lnSpc>
               <a:spcAft>
-                <a:spcPts val="900"/>
+                <a:spcPts val="1000"/>
               </a:spcAft>
               <a:buSzPct val="100000"/>
               <a:buChar char="•"/>
@@ -3644,7 +3644,7 @@
                 <a:ea typeface="Calibri" pitchFamily="34" charset="-122"/>
                 <a:cs typeface="Calibri" pitchFamily="34" charset="-120"/>
               </a:rPr>
-              <a:t>Modern adult target: 6 to 8 mL per kilogram of IDEAL body weight.</a:t>
+              <a:t>Modern adult target: 6 to 8 mL per kilogram of IDEAL body weight. Lower (4 to 6 mL/kg IBW) for ARDS. Pediatric: 6 to 8 mL/kg of ACTUAL body weight.</a:t>
             </a:r>
             <a:endParaRPr lang="en-US" sz="1550" dirty="0"/>
           </a:p>
@@ -3654,7 +3654,7 @@
                 <a:spcPct val="100000"/>
               </a:lnSpc>
               <a:spcAft>
-                <a:spcPts val="900"/>
+                <a:spcPts val="1000"/>
               </a:spcAft>
               <a:buSzPct val="100000"/>
               <a:buChar char="•"/>
@@ -3668,7 +3668,7 @@
                 <a:ea typeface="Calibri" pitchFamily="34" charset="-122"/>
                 <a:cs typeface="Calibri" pitchFamily="34" charset="-120"/>
               </a:rPr>
-              <a:t>History matters.</a:t>
+              <a:t>History matters. The 1990s standard was 10 to 12 mL/kg. ARDSNet ARMA (NEJM 2000) randomized 861 ARDS patients to 12 vs 6 mL/kg IBW. Mortality dropped from 39.8% to 31.0% (NNT 11).</a:t>
             </a:r>
             <a:endParaRPr lang="en-US" sz="1550" dirty="0"/>
           </a:p>
@@ -3678,7 +3678,7 @@
                 <a:spcPct val="100000"/>
               </a:lnSpc>
               <a:spcAft>
-                <a:spcPts val="900"/>
+                <a:spcPts val="1000"/>
               </a:spcAft>
               <a:buSzPct val="100000"/>
               <a:buChar char="•"/>
@@ -3692,7 +3692,7 @@
                 <a:ea typeface="Calibri" pitchFamily="34" charset="-122"/>
                 <a:cs typeface="Calibri" pitchFamily="34" charset="-120"/>
               </a:rPr>
-              <a:t>Too low: dead space eats the breath; CO₂ rises despite normal-looking MV.</a:t>
+              <a:t>Too low: dead space eats the breath; CO₂ rises despite normal-looking MV. Too high: alveolar over-distention, volutrauma. Always use IBW, not actual.</a:t>
             </a:r>
             <a:endParaRPr lang="en-US" sz="1550" dirty="0"/>
           </a:p>
@@ -4001,7 +4001,7 @@
         <p:spPr>
           <a:xfrm>
             <a:off x="548640" y="2148840"/>
-            <a:ext cx="10058400" cy="4114800"/>
+            <a:ext cx="10058400" cy="4160520"/>
           </a:xfrm>
           <a:prstGeom prst="rect">
             <a:avLst/>
@@ -4018,7 +4018,7 @@
                 <a:spcPct val="100000"/>
               </a:lnSpc>
               <a:spcAft>
-                <a:spcPts val="900"/>
+                <a:spcPts val="1000"/>
               </a:spcAft>
               <a:buSzPct val="100000"/>
               <a:buChar char="•"/>
@@ -4032,7 +4032,7 @@
                 <a:ea typeface="Calibri" pitchFamily="34" charset="-122"/>
                 <a:cs typeface="Calibri" pitchFamily="34" charset="-120"/>
               </a:rPr>
-              <a:t>Respiratory rate is the number of mandatory breaths per minute the vent delivers.</a:t>
+              <a:t>Respiratory rate is the number of mandatory breaths per minute the vent delivers. Adult initial: 12 to 16, titrated to EtCO₂ 35 to 45.</a:t>
             </a:r>
             <a:endParaRPr lang="en-US" sz="1550" dirty="0"/>
           </a:p>
@@ -4042,7 +4042,7 @@
                 <a:spcPct val="100000"/>
               </a:lnSpc>
               <a:spcAft>
-                <a:spcPts val="900"/>
+                <a:spcPts val="1000"/>
               </a:spcAft>
               <a:buSzPct val="100000"/>
               <a:buChar char="•"/>
@@ -4056,7 +4056,7 @@
                 <a:ea typeface="Calibri" pitchFamily="34" charset="-122"/>
                 <a:cs typeface="Calibri" pitchFamily="34" charset="-120"/>
               </a:rPr>
-              <a:t>Lower (8 to 10) for asthma/COPD — let them exhale.</a:t>
+              <a:t>Lower (8 to 10) for asthma/COPD — let them exhale. Higher (18 to 22) in ARDS where Vt is reduced.</a:t>
             </a:r>
             <a:endParaRPr lang="en-US" sz="1550" dirty="0"/>
           </a:p>
@@ -4066,7 +4066,7 @@
                 <a:spcPct val="100000"/>
               </a:lnSpc>
               <a:spcAft>
-                <a:spcPts val="900"/>
+                <a:spcPts val="1000"/>
               </a:spcAft>
               <a:buSzPct val="100000"/>
               <a:buChar char="•"/>
@@ -4080,7 +4080,7 @@
                 <a:ea typeface="Calibri" pitchFamily="34" charset="-122"/>
                 <a:cs typeface="Calibri" pitchFamily="34" charset="-120"/>
               </a:rPr>
-              <a:t>Minute ventilation (MV) = RR × Vt.</a:t>
+              <a:t>Minute ventilation (MV) = RR × Vt. Adult target 6 to 8 L/min. For a 70 kg IBW adult: Vt 480 mL × RR 14 = 6.7 L/min, right in range.</a:t>
             </a:r>
             <a:endParaRPr lang="en-US" sz="1550" dirty="0"/>
           </a:p>
@@ -4090,7 +4090,7 @@
                 <a:spcPct val="100000"/>
               </a:lnSpc>
               <a:spcAft>
-                <a:spcPts val="900"/>
+                <a:spcPts val="1000"/>
               </a:spcAft>
               <a:buSzPct val="100000"/>
               <a:buChar char="•"/>
@@ -4104,7 +4104,7 @@
                 <a:ea typeface="Calibri" pitchFamily="34" charset="-122"/>
                 <a:cs typeface="Calibri" pitchFamily="34" charset="-120"/>
               </a:rPr>
-              <a:t>Set the LOW MV alarm at ~70% of expected MV.</a:t>
+              <a:t>Set the LOW MV alarm at ~70% of expected MV. The apnea alarm fires after 20 seconds of no breath — by then the patient has been failing for a while.</a:t>
             </a:r>
             <a:endParaRPr lang="en-US" sz="1550" dirty="0"/>
           </a:p>
@@ -4268,7 +4268,7 @@
         <p:spPr>
           <a:xfrm>
             <a:off x="548640" y="2148840"/>
-            <a:ext cx="6309360" cy="4114800"/>
+            <a:ext cx="6309360" cy="4160520"/>
           </a:xfrm>
           <a:prstGeom prst="rect">
             <a:avLst/>
@@ -4285,7 +4285,7 @@
                 <a:spcPct val="100000"/>
               </a:lnSpc>
               <a:spcAft>
-                <a:spcPts val="900"/>
+                <a:spcPts val="1000"/>
               </a:spcAft>
               <a:buSzPct val="100000"/>
               <a:buChar char="•"/>
@@ -4299,7 +4299,7 @@
                 <a:ea typeface="Calibri" pitchFamily="34" charset="-122"/>
                 <a:cs typeface="Calibri" pitchFamily="34" charset="-120"/>
               </a:rPr>
-              <a:t>FiO₂ is the fraction of oxygen in the inspired gas.</a:t>
+              <a:t>FiO₂ is the fraction of oxygen in the inspired gas. Range 0.21 (room air) to 1.00 (100%). Start at 100% on every fresh intubation; wean.</a:t>
             </a:r>
             <a:endParaRPr lang="en-US" sz="1550" dirty="0"/>
           </a:p>
@@ -4309,7 +4309,7 @@
                 <a:spcPct val="100000"/>
               </a:lnSpc>
               <a:spcAft>
-                <a:spcPts val="900"/>
+                <a:spcPts val="1000"/>
               </a:spcAft>
               <a:buSzPct val="100000"/>
               <a:buChar char="•"/>
@@ -4323,7 +4323,7 @@
                 <a:ea typeface="Calibri" pitchFamily="34" charset="-122"/>
                 <a:cs typeface="Calibri" pitchFamily="34" charset="-120"/>
               </a:rPr>
-              <a:t>Target SpO₂ ≥ 92% (adult), ≥ 88% (COPD per GOLD), ≥ 94% (TBI per BTF).</a:t>
+              <a:t>Target SpO₂ ≥ 92% (adult), ≥ 88% (COPD per GOLD), ≥ 94% (TBI per BTF). Hyperoxia post-ROSC worsens neurologic outcome — AHA recommends SpO₂ 90–98% after cardiac arrest (2025 update; previously 92–98%).</a:t>
             </a:r>
             <a:endParaRPr lang="en-US" sz="1550" dirty="0"/>
           </a:p>
@@ -4333,7 +4333,7 @@
                 <a:spcPct val="100000"/>
               </a:lnSpc>
               <a:spcAft>
-                <a:spcPts val="900"/>
+                <a:spcPts val="1000"/>
               </a:spcAft>
               <a:buSzPct val="100000"/>
               <a:buChar char="•"/>
@@ -4347,7 +4347,7 @@
                 <a:ea typeface="Calibri" pitchFamily="34" charset="-122"/>
                 <a:cs typeface="Calibri" pitchFamily="34" charset="-120"/>
               </a:rPr>
-              <a:t>PEEP is the pressure remaining in airways at end-exhalation.</a:t>
+              <a:t>PEEP is the pressure remaining in airways at end-exhalation. Adult default 5 cmH₂O. ARDS uses 10–15 cmH₂O paired with FiO₂ per the ARDSNet table.</a:t>
             </a:r>
             <a:endParaRPr lang="en-US" sz="1550" dirty="0"/>
           </a:p>
@@ -4357,7 +4357,7 @@
                 <a:spcPct val="100000"/>
               </a:lnSpc>
               <a:spcAft>
-                <a:spcPts val="900"/>
+                <a:spcPts val="1000"/>
               </a:spcAft>
               <a:buSzPct val="100000"/>
               <a:buChar char="•"/>
@@ -4371,7 +4371,7 @@
                 <a:ea typeface="Calibri" pitchFamily="34" charset="-122"/>
                 <a:cs typeface="Calibri" pitchFamily="34" charset="-120"/>
               </a:rPr>
-              <a:t>PEEP recruits collapsed alveoli — the fix for shunt physiology.</a:t>
+              <a:t>PEEP recruits collapsed alveoli — the fix for shunt physiology. It also reduces preload, which can drop BP in volume-depleted patients. Pair PEEP with FiO₂ together, not separately.</a:t>
             </a:r>
             <a:endParaRPr lang="en-US" sz="1550" dirty="0"/>
           </a:p>
@@ -4680,7 +4680,7 @@
         <p:spPr>
           <a:xfrm>
             <a:off x="548640" y="2148840"/>
-            <a:ext cx="10058400" cy="4114800"/>
+            <a:ext cx="10058400" cy="4160520"/>
           </a:xfrm>
           <a:prstGeom prst="rect">
             <a:avLst/>
@@ -4697,7 +4697,7 @@
                 <a:spcPct val="100000"/>
               </a:lnSpc>
               <a:spcAft>
-                <a:spcPts val="900"/>
+                <a:spcPts val="1000"/>
               </a:spcAft>
               <a:buSzPct val="100000"/>
               <a:buChar char="•"/>
@@ -4711,7 +4711,7 @@
                 <a:ea typeface="Calibri" pitchFamily="34" charset="-122"/>
                 <a:cs typeface="Calibri" pitchFamily="34" charset="-120"/>
               </a:rPr>
-              <a:t>I:E is the ratio of inspiratory time to expiratory time.</a:t>
+              <a:t>I:E is the ratio of inspiratory time to expiratory time. Adult default is 1:2 — inspiration takes half as long as exhalation.</a:t>
             </a:r>
             <a:endParaRPr lang="en-US" sz="1550" dirty="0"/>
           </a:p>
@@ -4721,7 +4721,7 @@
                 <a:spcPct val="100000"/>
               </a:lnSpc>
               <a:spcAft>
-                <a:spcPts val="900"/>
+                <a:spcPts val="1000"/>
               </a:spcAft>
               <a:buSzPct val="100000"/>
               <a:buChar char="•"/>
@@ -4735,7 +4735,7 @@
                 <a:ea typeface="Calibri" pitchFamily="34" charset="-122"/>
                 <a:cs typeface="Calibri" pitchFamily="34" charset="-120"/>
               </a:rPr>
-              <a:t>In obstructive disease (asthma, COPD), set 1:4 or 1:5.</a:t>
+              <a:t>In obstructive disease (asthma, COPD), set 1:4 or 1:5. Let the patient exhale. Forcing the rate up traps gas (auto-PEEP), drops blood pressure, and risks barotrauma.</a:t>
             </a:r>
             <a:endParaRPr lang="en-US" sz="1550" dirty="0"/>
           </a:p>
@@ -4745,7 +4745,7 @@
                 <a:spcPct val="100000"/>
               </a:lnSpc>
               <a:spcAft>
-                <a:spcPts val="900"/>
+                <a:spcPts val="1000"/>
               </a:spcAft>
               <a:buSzPct val="100000"/>
               <a:buChar char="•"/>
@@ -4759,7 +4759,7 @@
                 <a:ea typeface="Calibri" pitchFamily="34" charset="-122"/>
                 <a:cs typeface="Calibri" pitchFamily="34" charset="-120"/>
               </a:rPr>
-              <a:t>On the LTV: you set inspiratory TIME in seconds (typically 1.0 to 1.2 in adults).</a:t>
+              <a:t>On the LTV: you set inspiratory TIME in seconds (typically 1.0 to 1.2 in adults). The screen calculates the I:E.</a:t>
             </a:r>
             <a:endParaRPr lang="en-US" sz="1550" dirty="0"/>
           </a:p>
@@ -4769,7 +4769,7 @@
                 <a:spcPct val="100000"/>
               </a:lnSpc>
               <a:spcAft>
-                <a:spcPts val="900"/>
+                <a:spcPts val="1000"/>
               </a:spcAft>
               <a:buSzPct val="100000"/>
               <a:buChar char="•"/>
@@ -4783,7 +4783,7 @@
                 <a:ea typeface="Calibri" pitchFamily="34" charset="-122"/>
                 <a:cs typeface="Calibri" pitchFamily="34" charset="-120"/>
               </a:rPr>
-              <a:t>Watch the expiratory flow waveform.</a:t>
+              <a:t>Watch the expiratory flow waveform. If it doesn't return to zero before the next breath starts, you have auto-PEEP. Slow the rate and lengthen exhalation.</a:t>
             </a:r>
             <a:endParaRPr lang="en-US" sz="1550" dirty="0"/>
           </a:p>
@@ -4947,7 +4947,7 @@
         <p:spPr>
           <a:xfrm>
             <a:off x="548640" y="2148840"/>
-            <a:ext cx="6309360" cy="4114800"/>
+            <a:ext cx="6309360" cy="4160520"/>
           </a:xfrm>
           <a:prstGeom prst="rect">
             <a:avLst/>
@@ -4964,7 +4964,7 @@
                 <a:spcPct val="100000"/>
               </a:lnSpc>
               <a:spcAft>
-                <a:spcPts val="900"/>
+                <a:spcPts val="1000"/>
               </a:spcAft>
               <a:buSzPct val="100000"/>
               <a:buChar char="•"/>
@@ -4978,7 +4978,7 @@
                 <a:ea typeface="Calibri" pitchFamily="34" charset="-122"/>
                 <a:cs typeface="Calibri" pitchFamily="34" charset="-120"/>
               </a:rPr>
-              <a:t>Peak Inspiratory Pressure (PIP): highest airway pressure during inspiration.</a:t>
+              <a:t>Peak Inspiratory Pressure (PIP): highest airway pressure during inspiration. Displayed continuously. Keep &lt; 35 cmH₂O.</a:t>
             </a:r>
             <a:endParaRPr lang="en-US" sz="1550" dirty="0"/>
           </a:p>
@@ -4988,7 +4988,7 @@
                 <a:spcPct val="100000"/>
               </a:lnSpc>
               <a:spcAft>
-                <a:spcPts val="900"/>
+                <a:spcPts val="1000"/>
               </a:spcAft>
               <a:buSzPct val="100000"/>
               <a:buChar char="•"/>
@@ -5002,7 +5002,7 @@
                 <a:ea typeface="Calibri" pitchFamily="34" charset="-122"/>
                 <a:cs typeface="Calibri" pitchFamily="34" charset="-120"/>
               </a:rPr>
-              <a:t>Plateau Pressure (Pplat): airway pressure during a 0.5-second inspiratory hold (no flow).</a:t>
+              <a:t>Plateau Pressure (Pplat): airway pressure during a 0.5-second inspiratory hold (no flow). Reflects alveolar pressure / compliance. Keep &lt; 30 cmH₂O — ARDSNet protocol.</a:t>
             </a:r>
             <a:endParaRPr lang="en-US" sz="1550" dirty="0"/>
           </a:p>
@@ -5012,7 +5012,7 @@
                 <a:spcPct val="100000"/>
               </a:lnSpc>
               <a:spcAft>
-                <a:spcPts val="900"/>
+                <a:spcPts val="1000"/>
               </a:spcAft>
               <a:buSzPct val="100000"/>
               <a:buChar char="•"/>
@@ -5026,7 +5026,7 @@
                 <a:ea typeface="Calibri" pitchFamily="34" charset="-122"/>
                 <a:cs typeface="Calibri" pitchFamily="34" charset="-120"/>
               </a:rPr>
-              <a:t>Math: PIP ≈ Pplat + (Resistance × Flow).</a:t>
+              <a:t>Math: PIP ≈ Pplat + (Resistance × Flow). High PIP + normal Pplat = AIRWAY problem (resistance). Both high = LUNG problem (compliance).</a:t>
             </a:r>
             <a:endParaRPr lang="en-US" sz="1550" dirty="0"/>
           </a:p>
@@ -5036,7 +5036,7 @@
                 <a:spcPct val="100000"/>
               </a:lnSpc>
               <a:spcAft>
-                <a:spcPts val="900"/>
+                <a:spcPts val="1000"/>
               </a:spcAft>
               <a:buSzPct val="100000"/>
               <a:buChar char="•"/>
@@ -5050,7 +5050,7 @@
                 <a:ea typeface="Calibri" pitchFamily="34" charset="-122"/>
                 <a:cs typeface="Calibri" pitchFamily="34" charset="-120"/>
               </a:rPr>
-              <a:t>Driving pressure (ΔP) = Pplat − PEEP.</a:t>
+              <a:t>Driving pressure (ΔP) = Pplat − PEEP. Amato et al. (NEJM 2015) reanalyzed nine ARDS RCTs and showed ΔP was the strongest mortality predictor. Each 7 cmH₂O rise increased mortality ~40%.</a:t>
             </a:r>
             <a:endParaRPr lang="en-US" sz="1550" dirty="0"/>
           </a:p>
@@ -5359,7 +5359,7 @@
         <p:spPr>
           <a:xfrm>
             <a:off x="548640" y="2148840"/>
-            <a:ext cx="6309360" cy="4114800"/>
+            <a:ext cx="6309360" cy="4160520"/>
           </a:xfrm>
           <a:prstGeom prst="rect">
             <a:avLst/>
@@ -5376,7 +5376,7 @@
                 <a:spcPct val="100000"/>
               </a:lnSpc>
               <a:spcAft>
-                <a:spcPts val="900"/>
+                <a:spcPts val="1000"/>
               </a:spcAft>
               <a:buSzPct val="100000"/>
               <a:buChar char="•"/>
@@ -5390,7 +5390,7 @@
                 <a:ea typeface="Calibri" pitchFamily="34" charset="-122"/>
                 <a:cs typeface="Calibri" pitchFamily="34" charset="-120"/>
               </a:rPr>
-              <a:t>Devine IBW formulas.</a:t>
+              <a:t>Devine IBW formulas. Men: 50 + 2.3 × (inches over 60). Women: 45.5 + 2.3 × (inches over 60).</a:t>
             </a:r>
             <a:endParaRPr lang="en-US" sz="1550" dirty="0"/>
           </a:p>
@@ -5400,7 +5400,7 @@
                 <a:spcPct val="100000"/>
               </a:lnSpc>
               <a:spcAft>
-                <a:spcPts val="900"/>
+                <a:spcPts val="1000"/>
               </a:spcAft>
               <a:buSzPct val="100000"/>
               <a:buChar char="•"/>
@@ -5414,7 +5414,7 @@
                 <a:ea typeface="Calibri" pitchFamily="34" charset="-122"/>
                 <a:cs typeface="Calibri" pitchFamily="34" charset="-120"/>
               </a:rPr>
-              <a:t>Examples.</a:t>
+              <a:t>Examples. 5'6" man: 50 + 2.3 × 6 = 63.8 kg → safe Vt 380–510 mL. 5'10" woman: 45.5 + 2.3 × 10 = 68.5 kg → safe Vt 410–548 mL.</a:t>
             </a:r>
             <a:endParaRPr lang="en-US" sz="1550" dirty="0"/>
           </a:p>
@@ -5424,7 +5424,7 @@
                 <a:spcPct val="100000"/>
               </a:lnSpc>
               <a:spcAft>
-                <a:spcPts val="900"/>
+                <a:spcPts val="1000"/>
               </a:spcAft>
               <a:buSzPct val="100000"/>
               <a:buChar char="•"/>
@@ -5438,7 +5438,7 @@
                 <a:ea typeface="Calibri" pitchFamily="34" charset="-122"/>
                 <a:cs typeface="Calibri" pitchFamily="34" charset="-120"/>
               </a:rPr>
-              <a:t>Safe adult defaults to defend: AC/VC mode; Vt 6–8 mL/kg IBW; RR 14, titrated to EtCO₂ 35–45; FiO₂ 100% then wean; PEEP 5; I:E 1:2; alarms PIP 35, low MV…</a:t>
+              <a:t>Safe adult defaults to defend: AC/VC mode; Vt 6–8 mL/kg IBW; RR 14, titrated to EtCO₂ 35–45; FiO₂ 100% then wean; PEEP 5; I:E 1:2; alarms PIP 35, low MV 4, low PEEP 3, apnea 20 sec.</a:t>
             </a:r>
             <a:endParaRPr lang="en-US" sz="1550" dirty="0"/>
           </a:p>
@@ -5448,7 +5448,7 @@
                 <a:spcPct val="100000"/>
               </a:lnSpc>
               <a:spcAft>
-                <a:spcPts val="900"/>
+                <a:spcPts val="1000"/>
               </a:spcAft>
               <a:buSzPct val="100000"/>
               <a:buChar char="•"/>
@@ -5462,7 +5462,7 @@
                 <a:ea typeface="Calibri" pitchFamily="34" charset="-122"/>
                 <a:cs typeface="Calibri" pitchFamily="34" charset="-120"/>
               </a:rPr>
-              <a:t>When in doubt, return to defaults.</a:t>
+              <a:t>When in doubt, return to defaults. Change ONE thing at a time, reassess in 30 seconds, and document with vitals before and after.</a:t>
             </a:r>
             <a:endParaRPr lang="en-US" sz="1550" dirty="0"/>
           </a:p>
@@ -5607,7 +5607,7 @@
                 <a:ea typeface="Calibri" pitchFamily="34" charset="-122"/>
                 <a:cs typeface="Calibri" pitchFamily="34" charset="-120"/>
               </a:rPr>
-              <a:t>5'10" adult ≈ 73 kg IBW → Vt 440–580 mL. Memorize this anchor for when you don't have a card handy.</a:t>
+              <a:t>IBW is sex-specific — one number won't do. By the Devine formulas a 5'10" man ≈ 73 kg (Vt 440–580 mL) and a 5'10" woman ≈ 68.5 kg (Vt 410–548 mL). Anchor to the patient's sex and height, never actual weight.</a:t>
             </a:r>
             <a:endParaRPr lang="en-US" sz="1350" dirty="0"/>
           </a:p>
@@ -6131,7 +6131,9 @@
       </p:sp>
       <p:sp>
         <p:nvSpPr>
-          <p:cNvPr id="14" name="Text 12"/>
+          <p:cNvPr id="14" name="Text 12">
+            <a:hlinkClick r:id="rId1" tooltip="Open this module's simulator mission"/>
+          </p:cNvPr>
           <p:cNvSpPr/>
           <p:nvPr/>
         </p:nvSpPr>
@@ -6154,13 +6156,20 @@
               <a:buNone/>
             </a:pPr>
             <a:r>
-              <a:rPr lang="en-US" sz="1700" b="1" dirty="0">
+              <a:rPr lang="en-US" sz="1700" b="1" u="sng" dirty="0">
                 <a:solidFill>
                   <a:srgbClr val="FFFFFF"/>
                 </a:solidFill>
                 <a:latin typeface="Calibri" pitchFamily="34" charset="0"/>
                 <a:ea typeface="Calibri" pitchFamily="34" charset="-122"/>
                 <a:cs typeface="Calibri" pitchFamily="34" charset="-120"/>
+                <a:hlinkClick r:id="rId1" invalidUrl="" action="" tgtFrame="" tooltip="Open this module's simulator mission" history="1" highlightClick="0" endSnd="0">
+                  <a:extLst>
+                    <a:ext uri="{A12FA001-AC4F-418D-AE19-62706E023703}">
+                      <ahyp:hlinkClr xmlns:ahyp="http://schemas.microsoft.com/office/drawing/2018/hyperlinkcolor" val="tx"/>
+                    </a:ext>
+                  </a:extLst>
+                </a:hlinkClick>
               </a:rPr>
               <a:t>LTV 1200 Simulator</a:t>
             </a:r>
@@ -6193,13 +6202,20 @@
               <a:buNone/>
             </a:pPr>
             <a:r>
-              <a:rPr lang="en-US" sz="1250" dirty="0">
-                <a:solidFill>
-                  <a:srgbClr val="A9C2E0"/>
-                </a:solidFill>
-                <a:latin typeface="Calibri" pitchFamily="34" charset="0"/>
-                <a:ea typeface="Calibri" pitchFamily="34" charset="-122"/>
-                <a:cs typeface="Calibri" pitchFamily="34" charset="-120"/>
+              <a:rPr lang="en-US" sz="1250" u="sng" dirty="0">
+                <a:solidFill>
+                  <a:srgbClr val="7FB0E6"/>
+                </a:solidFill>
+                <a:latin typeface="Calibri" pitchFamily="34" charset="0"/>
+                <a:ea typeface="Calibri" pitchFamily="34" charset="-122"/>
+                <a:cs typeface="Calibri" pitchFamily="34" charset="-120"/>
+                <a:hlinkClick r:id="rId2" invalidUrl="" action="" tgtFrame="" tooltip="" history="1" highlightClick="0" endSnd="0">
+                  <a:extLst>
+                    <a:ext uri="{A12FA001-AC4F-418D-AE19-62706E023703}">
+                      <ahyp:hlinkClr xmlns:ahyp="http://schemas.microsoft.com/office/drawing/2018/hyperlinkcolor" val="tx"/>
+                    </a:ext>
+                  </a:extLst>
+                </a:hlinkClick>
               </a:rPr>
               <a:t>vent-ltv1200.html?scenario=initial-settings  —  Build safe initial settings on a freshly intubated patient — Vt by IBW, PEEP, and…</a:t>
             </a:r>

--- a/vta/slides/Module_4_Vent_Vocabulary_Initial_Settings.pptx
+++ b/vta/slides/Module_4_Vent_Vocabulary_Initial_Settings.pptx
@@ -5056,151 +5056,30 @@
           </a:p>
         </p:txBody>
       </p:sp>
-      <p:sp>
-        <p:nvSpPr>
-          <p:cNvPr id="6" name="Shape 4"/>
-          <p:cNvSpPr/>
-          <p:nvPr/>
-        </p:nvSpPr>
-        <p:spPr>
-          <a:xfrm>
-            <a:off x="7315200" y="2148840"/>
-            <a:ext cx="4325112" cy="3840480"/>
-          </a:xfrm>
-          <a:prstGeom prst="roundRect">
-            <a:avLst>
-              <a:gd name="adj" fmla="val 2381"/>
-            </a:avLst>
-          </a:prstGeom>
-          <a:solidFill>
-            <a:srgbClr val="E7F0FD"/>
-          </a:solidFill>
-          <a:ln/>
-        </p:spPr>
-      </p:sp>
-      <p:sp>
-        <p:nvSpPr>
-          <p:cNvPr id="7" name="Text 5"/>
-          <p:cNvSpPr/>
-          <p:nvPr/>
-        </p:nvSpPr>
-        <p:spPr>
-          <a:xfrm>
-            <a:off x="7589520" y="2377440"/>
-            <a:ext cx="3776472" cy="320040"/>
+      <p:pic>
+        <p:nvPicPr>
+          <p:cNvPr id="6" name="Image 0" descr="/tmp/claude-0/-home-user-amr-kc-protocols/883711fe-5eaa-500f-ae13-4d63d2ddcc7e/scratchpad/pngs/pip_pplat.png">    </p:cNvPr>
+          <p:cNvPicPr>
+            <a:picLocks noChangeAspect="1"/>
+          </p:cNvPicPr>
+          <p:nvPr/>
+        </p:nvPicPr>
+        <p:blipFill>
+          <a:blip r:embed="rId1"/>
+          <a:stretch>
+            <a:fillRect/>
+          </a:stretch>
+        </p:blipFill>
+        <p:spPr>
+          <a:xfrm>
+            <a:off x="7040880" y="2634454"/>
+            <a:ext cx="4709160" cy="2320612"/>
           </a:xfrm>
           <a:prstGeom prst="rect">
             <a:avLst/>
           </a:prstGeom>
-          <a:noFill/>
-          <a:ln/>
-        </p:spPr>
-        <p:txBody>
-          <a:bodyPr wrap="square" rtlCol="0" anchor="ctr"/>
-          <a:lstStyle/>
-          <a:p>
-            <a:pPr indent="0" marL="0">
-              <a:buNone/>
-            </a:pPr>
-            <a:r>
-              <a:rPr lang="en-US" sz="1200" b="1" spc="200" kern="0" dirty="0">
-                <a:solidFill>
-                  <a:srgbClr val="1B63C4"/>
-                </a:solidFill>
-                <a:latin typeface="Calibri" pitchFamily="34" charset="0"/>
-                <a:ea typeface="Calibri" pitchFamily="34" charset="-122"/>
-                <a:cs typeface="Calibri" pitchFamily="34" charset="-120"/>
-              </a:rPr>
-              <a:t>EVIDENCE</a:t>
-            </a:r>
-            <a:endParaRPr lang="en-US" sz="1200" dirty="0"/>
-          </a:p>
-        </p:txBody>
-      </p:sp>
-      <p:sp>
-        <p:nvSpPr>
-          <p:cNvPr id="8" name="Text 6"/>
-          <p:cNvSpPr/>
-          <p:nvPr/>
-        </p:nvSpPr>
-        <p:spPr>
-          <a:xfrm>
-            <a:off x="7589520" y="2715768"/>
-            <a:ext cx="3776472" cy="640080"/>
-          </a:xfrm>
-          <a:prstGeom prst="rect">
-            <a:avLst/>
-          </a:prstGeom>
-          <a:noFill/>
-          <a:ln/>
-        </p:spPr>
-        <p:txBody>
-          <a:bodyPr wrap="square" rtlCol="0" anchor="t"/>
-          <a:lstStyle/>
-          <a:p>
-            <a:pPr indent="0" marL="0">
-              <a:lnSpc>
-                <a:spcPct val="95000"/>
-              </a:lnSpc>
-              <a:buNone/>
-            </a:pPr>
-            <a:r>
-              <a:rPr lang="en-US" sz="1700" b="1" dirty="0">
-                <a:solidFill>
-                  <a:srgbClr val="173A68"/>
-                </a:solidFill>
-                <a:latin typeface="Cambria" pitchFamily="34" charset="0"/>
-                <a:ea typeface="Cambria" pitchFamily="34" charset="-122"/>
-                <a:cs typeface="Cambria" pitchFamily="34" charset="-120"/>
-              </a:rPr>
-              <a:t>Amato 2015 driving pressure</a:t>
-            </a:r>
-            <a:endParaRPr lang="en-US" sz="1700" dirty="0"/>
-          </a:p>
-        </p:txBody>
-      </p:sp>
-      <p:sp>
-        <p:nvSpPr>
-          <p:cNvPr id="9" name="Text 7"/>
-          <p:cNvSpPr/>
-          <p:nvPr/>
-        </p:nvSpPr>
-        <p:spPr>
-          <a:xfrm>
-            <a:off x="7589520" y="3474720"/>
-            <a:ext cx="3776472" cy="2286000"/>
-          </a:xfrm>
-          <a:prstGeom prst="rect">
-            <a:avLst/>
-          </a:prstGeom>
-          <a:noFill/>
-          <a:ln/>
-        </p:spPr>
-        <p:txBody>
-          <a:bodyPr wrap="square" rtlCol="0" anchor="t"/>
-          <a:lstStyle/>
-          <a:p>
-            <a:pPr indent="0" marL="0">
-              <a:lnSpc>
-                <a:spcPct val="103000"/>
-              </a:lnSpc>
-              <a:buNone/>
-            </a:pPr>
-            <a:r>
-              <a:rPr lang="en-US" sz="1350" dirty="0">
-                <a:solidFill>
-                  <a:srgbClr val="1B2433"/>
-                </a:solidFill>
-                <a:latin typeface="Calibri" pitchFamily="34" charset="0"/>
-                <a:ea typeface="Calibri" pitchFamily="34" charset="-122"/>
-                <a:cs typeface="Calibri" pitchFamily="34" charset="-120"/>
-              </a:rPr>
-              <a:t>Pplat − PEEP &lt; 14 cmH₂O is the modern ARDS target. Stronger mortality predictor than Vt, Pplat, or PEEP individually.</a:t>
-            </a:r>
-            <a:endParaRPr lang="en-US" sz="1350" dirty="0"/>
-          </a:p>
-        </p:txBody>
-      </p:sp>
+        </p:spPr>
+      </p:pic>
     </p:spTree>
   </p:cSld>
   <p:clrMapOvr>
